--- a/week3 - Blade/M8Prog laravel 04 - Components.pptx
+++ b/week3 - Blade/M8Prog laravel 04 - Components.pptx
@@ -17,6 +17,7 @@
     <p:sldId id="300" r:id="rId11"/>
     <p:sldId id="301" r:id="rId12"/>
     <p:sldId id="302" r:id="rId13"/>
+    <p:sldId id="288" r:id="rId14"/>
   </p:sldIdLst>
   <p:sldSz cx="12192000" cy="6858000"/>
   <p:notesSz cx="6858000" cy="9144000"/>
@@ -4440,6 +4441,148 @@
 </p:sld>
 </file>
 
+<file path=ppt/slides/slide13.xml><?xml version="1.0" encoding="utf-8"?>
+<p:sld xmlns:a="http://schemas.openxmlformats.org/drawingml/2006/main" xmlns:r="http://schemas.openxmlformats.org/officeDocument/2006/relationships" xmlns:p="http://schemas.openxmlformats.org/presentationml/2006/main">
+  <p:cSld>
+    <p:spTree>
+      <p:nvGrpSpPr>
+        <p:cNvPr id="1" name="">
+          <a:extLst>
+            <a:ext uri="{FF2B5EF4-FFF2-40B4-BE49-F238E27FC236}">
+              <a16:creationId xmlns:a16="http://schemas.microsoft.com/office/drawing/2014/main" id="{7266F234-F0BE-1B32-045B-1392113FB070}"/>
+            </a:ext>
+          </a:extLst>
+        </p:cNvPr>
+        <p:cNvGrpSpPr/>
+        <p:nvPr/>
+      </p:nvGrpSpPr>
+      <p:grpSpPr>
+        <a:xfrm>
+          <a:off x="0" y="0"/>
+          <a:ext cx="0" cy="0"/>
+          <a:chOff x="0" y="0"/>
+          <a:chExt cx="0" cy="0"/>
+        </a:xfrm>
+      </p:grpSpPr>
+      <p:sp>
+        <p:nvSpPr>
+          <p:cNvPr id="2" name="Title 1">
+            <a:extLst>
+              <a:ext uri="{FF2B5EF4-FFF2-40B4-BE49-F238E27FC236}">
+                <a16:creationId xmlns:a16="http://schemas.microsoft.com/office/drawing/2014/main" id="{FAF2A692-78E3-882F-D8B1-33931901F659}"/>
+              </a:ext>
+            </a:extLst>
+          </p:cNvPr>
+          <p:cNvSpPr>
+            <a:spLocks noGrp="1"/>
+          </p:cNvSpPr>
+          <p:nvPr>
+            <p:ph type="title"/>
+          </p:nvPr>
+        </p:nvSpPr>
+        <p:spPr/>
+        <p:txBody>
+          <a:bodyPr/>
+          <a:lstStyle/>
+          <a:p>
+            <a:r>
+              <a:rPr lang="nl-NL" dirty="0"/>
+              <a:t>Deze les</a:t>
+            </a:r>
+          </a:p>
+        </p:txBody>
+      </p:sp>
+      <p:sp>
+        <p:nvSpPr>
+          <p:cNvPr id="3" name="Content Placeholder 2">
+            <a:extLst>
+              <a:ext uri="{FF2B5EF4-FFF2-40B4-BE49-F238E27FC236}">
+                <a16:creationId xmlns:a16="http://schemas.microsoft.com/office/drawing/2014/main" id="{6D2639E8-D6B9-2C26-7E9C-B98B2FFAD52C}"/>
+              </a:ext>
+            </a:extLst>
+          </p:cNvPr>
+          <p:cNvSpPr>
+            <a:spLocks noGrp="1"/>
+          </p:cNvSpPr>
+          <p:nvPr>
+            <p:ph idx="1"/>
+          </p:nvPr>
+        </p:nvSpPr>
+        <p:spPr>
+          <a:xfrm>
+            <a:off x="838200" y="1825624"/>
+            <a:ext cx="5757472" cy="4380303"/>
+          </a:xfrm>
+        </p:spPr>
+        <p:txBody>
+          <a:bodyPr/>
+          <a:lstStyle/>
+          <a:p>
+            <a:r>
+              <a:rPr lang="nl-NL" dirty="0"/>
+              <a:t>In de les en huiswerk</a:t>
+            </a:r>
+            <a:endParaRPr lang="nl-NL" dirty="0">
+              <a:hlinkClick r:id="rId2"/>
+            </a:endParaRPr>
+          </a:p>
+          <a:p>
+            <a:r>
+              <a:rPr lang="nl-NL" dirty="0">
+                <a:hlinkClick r:id="rId3"/>
+              </a:rPr>
+              <a:t>https://github.com/progsen/m8prog_laravel/tree/main/week3%20-%20Blade</a:t>
+            </a:r>
+            <a:endParaRPr lang="nl-NL" dirty="0"/>
+          </a:p>
+          <a:p>
+            <a:endParaRPr lang="nl-NL" dirty="0"/>
+          </a:p>
+        </p:txBody>
+      </p:sp>
+      <p:pic>
+        <p:nvPicPr>
+          <p:cNvPr id="6" name="Picture 5">
+            <a:extLst>
+              <a:ext uri="{FF2B5EF4-FFF2-40B4-BE49-F238E27FC236}">
+                <a16:creationId xmlns:a16="http://schemas.microsoft.com/office/drawing/2014/main" id="{6E60D05E-2FA1-F4C2-2390-382F648997C9}"/>
+              </a:ext>
+            </a:extLst>
+          </p:cNvPr>
+          <p:cNvPicPr>
+            <a:picLocks noChangeAspect="1"/>
+          </p:cNvPicPr>
+          <p:nvPr/>
+        </p:nvPicPr>
+        <p:blipFill>
+          <a:blip r:embed="rId4"/>
+          <a:stretch>
+            <a:fillRect/>
+          </a:stretch>
+        </p:blipFill>
+        <p:spPr>
+          <a:xfrm>
+            <a:off x="4381499" y="4015775"/>
+            <a:ext cx="6589919" cy="1995281"/>
+          </a:xfrm>
+          <a:prstGeom prst="rect">
+            <a:avLst/>
+          </a:prstGeom>
+        </p:spPr>
+      </p:pic>
+    </p:spTree>
+    <p:extLst>
+      <p:ext uri="{BB962C8B-B14F-4D97-AF65-F5344CB8AC3E}">
+        <p14:creationId xmlns:p14="http://schemas.microsoft.com/office/powerpoint/2010/main" val="1569527089"/>
+      </p:ext>
+    </p:extLst>
+  </p:cSld>
+  <p:clrMapOvr>
+    <a:masterClrMapping/>
+  </p:clrMapOvr>
+</p:sld>
+</file>
+
 <file path=ppt/slides/slide2.xml><?xml version="1.0" encoding="utf-8"?>
 <p:sld xmlns:a="http://schemas.openxmlformats.org/drawingml/2006/main" xmlns:r="http://schemas.openxmlformats.org/officeDocument/2006/relationships" xmlns:p="http://schemas.openxmlformats.org/presentationml/2006/main">
   <p:cSld>
